--- a/PPT-Design/Animation-and-Design.pptx
+++ b/PPT-Design/Animation-and-Design.pptx
@@ -4,8 +4,12 @@
   <p:sldMasterIdLst>
     <p:sldMasterId id="2147483648" r:id="rId1"/>
   </p:sldMasterIdLst>
+  <p:notesMasterIdLst>
+    <p:notesMasterId r:id="rId4"/>
+  </p:notesMasterIdLst>
   <p:sldIdLst>
     <p:sldId id="256" r:id="rId2"/>
+    <p:sldId id="257" r:id="rId3"/>
   </p:sldIdLst>
   <p:sldSz cx="12192000" cy="6858000"/>
   <p:notesSz cx="6858000" cy="9144000"/>
@@ -112,6 +116,439 @@
 </p:presentation>
 </file>
 
+<file path=ppt/notesMasters/notesMaster1.xml><?xml version="1.0" encoding="utf-8"?>
+<p:notesMaster xmlns:a="http://schemas.openxmlformats.org/drawingml/2006/main" xmlns:r="http://schemas.openxmlformats.org/officeDocument/2006/relationships" xmlns:p="http://schemas.openxmlformats.org/presentationml/2006/main">
+  <p:cSld>
+    <p:bg>
+      <p:bgRef idx="1001">
+        <a:schemeClr val="bg1"/>
+      </p:bgRef>
+    </p:bg>
+    <p:spTree>
+      <p:nvGrpSpPr>
+        <p:cNvPr id="1" name=""/>
+        <p:cNvGrpSpPr/>
+        <p:nvPr/>
+      </p:nvGrpSpPr>
+      <p:grpSpPr>
+        <a:xfrm>
+          <a:off x="0" y="0"/>
+          <a:ext cx="0" cy="0"/>
+          <a:chOff x="0" y="0"/>
+          <a:chExt cx="0" cy="0"/>
+        </a:xfrm>
+      </p:grpSpPr>
+      <p:sp>
+        <p:nvSpPr>
+          <p:cNvPr id="2" name="頁首版面配置區 1"/>
+          <p:cNvSpPr>
+            <a:spLocks noGrp="1"/>
+          </p:cNvSpPr>
+          <p:nvPr>
+            <p:ph type="hdr" sz="quarter"/>
+          </p:nvPr>
+        </p:nvSpPr>
+        <p:spPr>
+          <a:xfrm>
+            <a:off x="0" y="0"/>
+            <a:ext cx="2971800" cy="458788"/>
+          </a:xfrm>
+          <a:prstGeom prst="rect">
+            <a:avLst/>
+          </a:prstGeom>
+        </p:spPr>
+        <p:txBody>
+          <a:bodyPr vert="horz" lIns="91440" tIns="45720" rIns="91440" bIns="45720" rtlCol="0"/>
+          <a:lstStyle>
+            <a:lvl1pPr algn="l">
+              <a:defRPr sz="1200"/>
+            </a:lvl1pPr>
+          </a:lstStyle>
+          <a:p>
+            <a:endParaRPr lang="zh-TW" altLang="en-US"/>
+          </a:p>
+        </p:txBody>
+      </p:sp>
+      <p:sp>
+        <p:nvSpPr>
+          <p:cNvPr id="3" name="日期版面配置區 2"/>
+          <p:cNvSpPr>
+            <a:spLocks noGrp="1"/>
+          </p:cNvSpPr>
+          <p:nvPr>
+            <p:ph type="dt" idx="1"/>
+          </p:nvPr>
+        </p:nvSpPr>
+        <p:spPr>
+          <a:xfrm>
+            <a:off x="3884613" y="0"/>
+            <a:ext cx="2971800" cy="458788"/>
+          </a:xfrm>
+          <a:prstGeom prst="rect">
+            <a:avLst/>
+          </a:prstGeom>
+        </p:spPr>
+        <p:txBody>
+          <a:bodyPr vert="horz" lIns="91440" tIns="45720" rIns="91440" bIns="45720" rtlCol="0"/>
+          <a:lstStyle>
+            <a:lvl1pPr algn="r">
+              <a:defRPr sz="1200"/>
+            </a:lvl1pPr>
+          </a:lstStyle>
+          <a:p>
+            <a:fld id="{9778BC1C-8C41-4DF7-8CBB-656C1437EC1B}" type="datetimeFigureOut">
+              <a:rPr lang="zh-TW" altLang="en-US" smtClean="0"/>
+              <a:t>2025/5/24</a:t>
+            </a:fld>
+            <a:endParaRPr lang="zh-TW" altLang="en-US"/>
+          </a:p>
+        </p:txBody>
+      </p:sp>
+      <p:sp>
+        <p:nvSpPr>
+          <p:cNvPr id="4" name="投影片影像版面配置區 3"/>
+          <p:cNvSpPr>
+            <a:spLocks noGrp="1" noRot="1" noChangeAspect="1"/>
+          </p:cNvSpPr>
+          <p:nvPr>
+            <p:ph type="sldImg" idx="2"/>
+          </p:nvPr>
+        </p:nvSpPr>
+        <p:spPr>
+          <a:xfrm>
+            <a:off x="685800" y="1143000"/>
+            <a:ext cx="5486400" cy="3086100"/>
+          </a:xfrm>
+          <a:prstGeom prst="rect">
+            <a:avLst/>
+          </a:prstGeom>
+          <a:noFill/>
+          <a:ln w="12700">
+            <a:solidFill>
+              <a:prstClr val="black"/>
+            </a:solidFill>
+          </a:ln>
+        </p:spPr>
+        <p:txBody>
+          <a:bodyPr vert="horz" lIns="91440" tIns="45720" rIns="91440" bIns="45720" rtlCol="0" anchor="ctr"/>
+          <a:lstStyle/>
+          <a:p>
+            <a:endParaRPr lang="zh-TW" altLang="en-US"/>
+          </a:p>
+        </p:txBody>
+      </p:sp>
+      <p:sp>
+        <p:nvSpPr>
+          <p:cNvPr id="5" name="備忘稿版面配置區 4"/>
+          <p:cNvSpPr>
+            <a:spLocks noGrp="1"/>
+          </p:cNvSpPr>
+          <p:nvPr>
+            <p:ph type="body" sz="quarter" idx="3"/>
+          </p:nvPr>
+        </p:nvSpPr>
+        <p:spPr>
+          <a:xfrm>
+            <a:off x="685800" y="4400550"/>
+            <a:ext cx="5486400" cy="3600450"/>
+          </a:xfrm>
+          <a:prstGeom prst="rect">
+            <a:avLst/>
+          </a:prstGeom>
+        </p:spPr>
+        <p:txBody>
+          <a:bodyPr vert="horz" lIns="91440" tIns="45720" rIns="91440" bIns="45720" rtlCol="0"/>
+          <a:lstStyle/>
+          <a:p>
+            <a:pPr lvl="0"/>
+            <a:r>
+              <a:rPr lang="zh-TW" altLang="en-US"/>
+              <a:t>按一下以編輯母片文字樣式</a:t>
+            </a:r>
+          </a:p>
+          <a:p>
+            <a:pPr lvl="1"/>
+            <a:r>
+              <a:rPr lang="zh-TW" altLang="en-US"/>
+              <a:t>第二層</a:t>
+            </a:r>
+          </a:p>
+          <a:p>
+            <a:pPr lvl="2"/>
+            <a:r>
+              <a:rPr lang="zh-TW" altLang="en-US"/>
+              <a:t>第三層</a:t>
+            </a:r>
+          </a:p>
+          <a:p>
+            <a:pPr lvl="3"/>
+            <a:r>
+              <a:rPr lang="zh-TW" altLang="en-US"/>
+              <a:t>第四層</a:t>
+            </a:r>
+          </a:p>
+          <a:p>
+            <a:pPr lvl="4"/>
+            <a:r>
+              <a:rPr lang="zh-TW" altLang="en-US"/>
+              <a:t>第五層</a:t>
+            </a:r>
+          </a:p>
+        </p:txBody>
+      </p:sp>
+      <p:sp>
+        <p:nvSpPr>
+          <p:cNvPr id="6" name="頁尾版面配置區 5"/>
+          <p:cNvSpPr>
+            <a:spLocks noGrp="1"/>
+          </p:cNvSpPr>
+          <p:nvPr>
+            <p:ph type="ftr" sz="quarter" idx="4"/>
+          </p:nvPr>
+        </p:nvSpPr>
+        <p:spPr>
+          <a:xfrm>
+            <a:off x="0" y="8685213"/>
+            <a:ext cx="2971800" cy="458787"/>
+          </a:xfrm>
+          <a:prstGeom prst="rect">
+            <a:avLst/>
+          </a:prstGeom>
+        </p:spPr>
+        <p:txBody>
+          <a:bodyPr vert="horz" lIns="91440" tIns="45720" rIns="91440" bIns="45720" rtlCol="0" anchor="b"/>
+          <a:lstStyle>
+            <a:lvl1pPr algn="l">
+              <a:defRPr sz="1200"/>
+            </a:lvl1pPr>
+          </a:lstStyle>
+          <a:p>
+            <a:endParaRPr lang="zh-TW" altLang="en-US"/>
+          </a:p>
+        </p:txBody>
+      </p:sp>
+      <p:sp>
+        <p:nvSpPr>
+          <p:cNvPr id="7" name="投影片編號版面配置區 6"/>
+          <p:cNvSpPr>
+            <a:spLocks noGrp="1"/>
+          </p:cNvSpPr>
+          <p:nvPr>
+            <p:ph type="sldNum" sz="quarter" idx="5"/>
+          </p:nvPr>
+        </p:nvSpPr>
+        <p:spPr>
+          <a:xfrm>
+            <a:off x="3884613" y="8685213"/>
+            <a:ext cx="2971800" cy="458787"/>
+          </a:xfrm>
+          <a:prstGeom prst="rect">
+            <a:avLst/>
+          </a:prstGeom>
+        </p:spPr>
+        <p:txBody>
+          <a:bodyPr vert="horz" lIns="91440" tIns="45720" rIns="91440" bIns="45720" rtlCol="0" anchor="b"/>
+          <a:lstStyle>
+            <a:lvl1pPr algn="r">
+              <a:defRPr sz="1200"/>
+            </a:lvl1pPr>
+          </a:lstStyle>
+          <a:p>
+            <a:fld id="{9A96A7E6-B75B-491D-B855-F79B4A980AE1}" type="slidenum">
+              <a:rPr lang="zh-TW" altLang="en-US" smtClean="0"/>
+              <a:t>‹#›</a:t>
+            </a:fld>
+            <a:endParaRPr lang="zh-TW" altLang="en-US"/>
+          </a:p>
+        </p:txBody>
+      </p:sp>
+    </p:spTree>
+    <p:extLst>
+      <p:ext uri="{BB962C8B-B14F-4D97-AF65-F5344CB8AC3E}">
+        <p14:creationId xmlns:p14="http://schemas.microsoft.com/office/powerpoint/2010/main" val="508474691"/>
+      </p:ext>
+    </p:extLst>
+  </p:cSld>
+  <p:clrMap bg1="lt1" tx1="dk1" bg2="lt2" tx2="dk2" accent1="accent1" accent2="accent2" accent3="accent3" accent4="accent4" accent5="accent5" accent6="accent6" hlink="hlink" folHlink="folHlink"/>
+  <p:notesStyle>
+    <a:lvl1pPr marL="0" algn="l" defTabSz="914400" rtl="0" eaLnBrk="1" latinLnBrk="0" hangingPunct="1">
+      <a:defRPr sz="1200" kern="1200">
+        <a:solidFill>
+          <a:schemeClr val="tx1"/>
+        </a:solidFill>
+        <a:latin typeface="+mn-lt"/>
+        <a:ea typeface="+mn-ea"/>
+        <a:cs typeface="+mn-cs"/>
+      </a:defRPr>
+    </a:lvl1pPr>
+    <a:lvl2pPr marL="457200" algn="l" defTabSz="914400" rtl="0" eaLnBrk="1" latinLnBrk="0" hangingPunct="1">
+      <a:defRPr sz="1200" kern="1200">
+        <a:solidFill>
+          <a:schemeClr val="tx1"/>
+        </a:solidFill>
+        <a:latin typeface="+mn-lt"/>
+        <a:ea typeface="+mn-ea"/>
+        <a:cs typeface="+mn-cs"/>
+      </a:defRPr>
+    </a:lvl2pPr>
+    <a:lvl3pPr marL="914400" algn="l" defTabSz="914400" rtl="0" eaLnBrk="1" latinLnBrk="0" hangingPunct="1">
+      <a:defRPr sz="1200" kern="1200">
+        <a:solidFill>
+          <a:schemeClr val="tx1"/>
+        </a:solidFill>
+        <a:latin typeface="+mn-lt"/>
+        <a:ea typeface="+mn-ea"/>
+        <a:cs typeface="+mn-cs"/>
+      </a:defRPr>
+    </a:lvl3pPr>
+    <a:lvl4pPr marL="1371600" algn="l" defTabSz="914400" rtl="0" eaLnBrk="1" latinLnBrk="0" hangingPunct="1">
+      <a:defRPr sz="1200" kern="1200">
+        <a:solidFill>
+          <a:schemeClr val="tx1"/>
+        </a:solidFill>
+        <a:latin typeface="+mn-lt"/>
+        <a:ea typeface="+mn-ea"/>
+        <a:cs typeface="+mn-cs"/>
+      </a:defRPr>
+    </a:lvl4pPr>
+    <a:lvl5pPr marL="1828800" algn="l" defTabSz="914400" rtl="0" eaLnBrk="1" latinLnBrk="0" hangingPunct="1">
+      <a:defRPr sz="1200" kern="1200">
+        <a:solidFill>
+          <a:schemeClr val="tx1"/>
+        </a:solidFill>
+        <a:latin typeface="+mn-lt"/>
+        <a:ea typeface="+mn-ea"/>
+        <a:cs typeface="+mn-cs"/>
+      </a:defRPr>
+    </a:lvl5pPr>
+    <a:lvl6pPr marL="2286000" algn="l" defTabSz="914400" rtl="0" eaLnBrk="1" latinLnBrk="0" hangingPunct="1">
+      <a:defRPr sz="1200" kern="1200">
+        <a:solidFill>
+          <a:schemeClr val="tx1"/>
+        </a:solidFill>
+        <a:latin typeface="+mn-lt"/>
+        <a:ea typeface="+mn-ea"/>
+        <a:cs typeface="+mn-cs"/>
+      </a:defRPr>
+    </a:lvl6pPr>
+    <a:lvl7pPr marL="2743200" algn="l" defTabSz="914400" rtl="0" eaLnBrk="1" latinLnBrk="0" hangingPunct="1">
+      <a:defRPr sz="1200" kern="1200">
+        <a:solidFill>
+          <a:schemeClr val="tx1"/>
+        </a:solidFill>
+        <a:latin typeface="+mn-lt"/>
+        <a:ea typeface="+mn-ea"/>
+        <a:cs typeface="+mn-cs"/>
+      </a:defRPr>
+    </a:lvl7pPr>
+    <a:lvl8pPr marL="3200400" algn="l" defTabSz="914400" rtl="0" eaLnBrk="1" latinLnBrk="0" hangingPunct="1">
+      <a:defRPr sz="1200" kern="1200">
+        <a:solidFill>
+          <a:schemeClr val="tx1"/>
+        </a:solidFill>
+        <a:latin typeface="+mn-lt"/>
+        <a:ea typeface="+mn-ea"/>
+        <a:cs typeface="+mn-cs"/>
+      </a:defRPr>
+    </a:lvl8pPr>
+    <a:lvl9pPr marL="3657600" algn="l" defTabSz="914400" rtl="0" eaLnBrk="1" latinLnBrk="0" hangingPunct="1">
+      <a:defRPr sz="1200" kern="1200">
+        <a:solidFill>
+          <a:schemeClr val="tx1"/>
+        </a:solidFill>
+        <a:latin typeface="+mn-lt"/>
+        <a:ea typeface="+mn-ea"/>
+        <a:cs typeface="+mn-cs"/>
+      </a:defRPr>
+    </a:lvl9pPr>
+  </p:notesStyle>
+</p:notesMaster>
+</file>
+
+<file path=ppt/notesSlides/notesSlide1.xml><?xml version="1.0" encoding="utf-8"?>
+<p:notes xmlns:a="http://schemas.openxmlformats.org/drawingml/2006/main" xmlns:r="http://schemas.openxmlformats.org/officeDocument/2006/relationships" xmlns:p="http://schemas.openxmlformats.org/presentationml/2006/main">
+  <p:cSld>
+    <p:spTree>
+      <p:nvGrpSpPr>
+        <p:cNvPr id="1" name=""/>
+        <p:cNvGrpSpPr/>
+        <p:nvPr/>
+      </p:nvGrpSpPr>
+      <p:grpSpPr>
+        <a:xfrm>
+          <a:off x="0" y="0"/>
+          <a:ext cx="0" cy="0"/>
+          <a:chOff x="0" y="0"/>
+          <a:chExt cx="0" cy="0"/>
+        </a:xfrm>
+      </p:grpSpPr>
+      <p:sp>
+        <p:nvSpPr>
+          <p:cNvPr id="2" name="投影片影像版面配置區 1"/>
+          <p:cNvSpPr>
+            <a:spLocks noGrp="1" noRot="1" noChangeAspect="1"/>
+          </p:cNvSpPr>
+          <p:nvPr>
+            <p:ph type="sldImg"/>
+          </p:nvPr>
+        </p:nvSpPr>
+        <p:spPr/>
+      </p:sp>
+      <p:sp>
+        <p:nvSpPr>
+          <p:cNvPr id="3" name="備忘稿版面配置區 2"/>
+          <p:cNvSpPr>
+            <a:spLocks noGrp="1"/>
+          </p:cNvSpPr>
+          <p:nvPr>
+            <p:ph type="body" idx="1"/>
+          </p:nvPr>
+        </p:nvSpPr>
+        <p:spPr/>
+        <p:txBody>
+          <a:bodyPr/>
+          <a:lstStyle/>
+          <a:p>
+            <a:endParaRPr lang="zh-TW" altLang="en-US" dirty="0"/>
+          </a:p>
+        </p:txBody>
+      </p:sp>
+      <p:sp>
+        <p:nvSpPr>
+          <p:cNvPr id="4" name="投影片編號版面配置區 3"/>
+          <p:cNvSpPr>
+            <a:spLocks noGrp="1"/>
+          </p:cNvSpPr>
+          <p:nvPr>
+            <p:ph type="sldNum" sz="quarter" idx="5"/>
+          </p:nvPr>
+        </p:nvSpPr>
+        <p:spPr/>
+        <p:txBody>
+          <a:bodyPr/>
+          <a:lstStyle/>
+          <a:p>
+            <a:fld id="{9A96A7E6-B75B-491D-B855-F79B4A980AE1}" type="slidenum">
+              <a:rPr lang="zh-TW" altLang="en-US" smtClean="0"/>
+              <a:t>1</a:t>
+            </a:fld>
+            <a:endParaRPr lang="zh-TW" altLang="en-US"/>
+          </a:p>
+        </p:txBody>
+      </p:sp>
+    </p:spTree>
+    <p:extLst>
+      <p:ext uri="{BB962C8B-B14F-4D97-AF65-F5344CB8AC3E}">
+        <p14:creationId xmlns:p14="http://schemas.microsoft.com/office/powerpoint/2010/main" val="693242143"/>
+      </p:ext>
+    </p:extLst>
+  </p:cSld>
+  <p:clrMapOvr>
+    <a:masterClrMapping/>
+  </p:clrMapOvr>
+</p:notes>
+</file>
+
 <file path=ppt/slideLayouts/slideLayout1.xml><?xml version="1.0" encoding="utf-8"?>
 <p:sldLayout xmlns:a="http://schemas.openxmlformats.org/drawingml/2006/main" xmlns:r="http://schemas.openxmlformats.org/officeDocument/2006/relationships" xmlns:p="http://schemas.openxmlformats.org/presentationml/2006/main" type="title" preserve="1">
   <p:cSld name="標題投影片">
@@ -259,7 +696,7 @@
           <a:p>
             <a:fld id="{1D26FEFA-CABF-4D3E-B0D4-C9C601D1E998}" type="datetimeFigureOut">
               <a:rPr lang="zh-TW" altLang="en-US" smtClean="0"/>
-              <a:t>2025/5/23</a:t>
+              <a:t>2025/5/24</a:t>
             </a:fld>
             <a:endParaRPr lang="zh-TW" altLang="en-US"/>
           </a:p>
@@ -457,7 +894,7 @@
           <a:p>
             <a:fld id="{1D26FEFA-CABF-4D3E-B0D4-C9C601D1E998}" type="datetimeFigureOut">
               <a:rPr lang="zh-TW" altLang="en-US" smtClean="0"/>
-              <a:t>2025/5/23</a:t>
+              <a:t>2025/5/24</a:t>
             </a:fld>
             <a:endParaRPr lang="zh-TW" altLang="en-US"/>
           </a:p>
@@ -665,7 +1102,7 @@
           <a:p>
             <a:fld id="{1D26FEFA-CABF-4D3E-B0D4-C9C601D1E998}" type="datetimeFigureOut">
               <a:rPr lang="zh-TW" altLang="en-US" smtClean="0"/>
-              <a:t>2025/5/23</a:t>
+              <a:t>2025/5/24</a:t>
             </a:fld>
             <a:endParaRPr lang="zh-TW" altLang="en-US"/>
           </a:p>
@@ -863,7 +1300,7 @@
           <a:p>
             <a:fld id="{1D26FEFA-CABF-4D3E-B0D4-C9C601D1E998}" type="datetimeFigureOut">
               <a:rPr lang="zh-TW" altLang="en-US" smtClean="0"/>
-              <a:t>2025/5/23</a:t>
+              <a:t>2025/5/24</a:t>
             </a:fld>
             <a:endParaRPr lang="zh-TW" altLang="en-US"/>
           </a:p>
@@ -1138,7 +1575,7 @@
           <a:p>
             <a:fld id="{1D26FEFA-CABF-4D3E-B0D4-C9C601D1E998}" type="datetimeFigureOut">
               <a:rPr lang="zh-TW" altLang="en-US" smtClean="0"/>
-              <a:t>2025/5/23</a:t>
+              <a:t>2025/5/24</a:t>
             </a:fld>
             <a:endParaRPr lang="zh-TW" altLang="en-US"/>
           </a:p>
@@ -1403,7 +1840,7 @@
           <a:p>
             <a:fld id="{1D26FEFA-CABF-4D3E-B0D4-C9C601D1E998}" type="datetimeFigureOut">
               <a:rPr lang="zh-TW" altLang="en-US" smtClean="0"/>
-              <a:t>2025/5/23</a:t>
+              <a:t>2025/5/24</a:t>
             </a:fld>
             <a:endParaRPr lang="zh-TW" altLang="en-US"/>
           </a:p>
@@ -1815,7 +2252,7 @@
           <a:p>
             <a:fld id="{1D26FEFA-CABF-4D3E-B0D4-C9C601D1E998}" type="datetimeFigureOut">
               <a:rPr lang="zh-TW" altLang="en-US" smtClean="0"/>
-              <a:t>2025/5/23</a:t>
+              <a:t>2025/5/24</a:t>
             </a:fld>
             <a:endParaRPr lang="zh-TW" altLang="en-US"/>
           </a:p>
@@ -1956,7 +2393,7 @@
           <a:p>
             <a:fld id="{1D26FEFA-CABF-4D3E-B0D4-C9C601D1E998}" type="datetimeFigureOut">
               <a:rPr lang="zh-TW" altLang="en-US" smtClean="0"/>
-              <a:t>2025/5/23</a:t>
+              <a:t>2025/5/24</a:t>
             </a:fld>
             <a:endParaRPr lang="zh-TW" altLang="en-US"/>
           </a:p>
@@ -2069,7 +2506,7 @@
           <a:p>
             <a:fld id="{1D26FEFA-CABF-4D3E-B0D4-C9C601D1E998}" type="datetimeFigureOut">
               <a:rPr lang="zh-TW" altLang="en-US" smtClean="0"/>
-              <a:t>2025/5/23</a:t>
+              <a:t>2025/5/24</a:t>
             </a:fld>
             <a:endParaRPr lang="zh-TW" altLang="en-US"/>
           </a:p>
@@ -2380,7 +2817,7 @@
           <a:p>
             <a:fld id="{1D26FEFA-CABF-4D3E-B0D4-C9C601D1E998}" type="datetimeFigureOut">
               <a:rPr lang="zh-TW" altLang="en-US" smtClean="0"/>
-              <a:t>2025/5/23</a:t>
+              <a:t>2025/5/24</a:t>
             </a:fld>
             <a:endParaRPr lang="zh-TW" altLang="en-US"/>
           </a:p>
@@ -2668,7 +3105,7 @@
           <a:p>
             <a:fld id="{1D26FEFA-CABF-4D3E-B0D4-C9C601D1E998}" type="datetimeFigureOut">
               <a:rPr lang="zh-TW" altLang="en-US" smtClean="0"/>
-              <a:t>2025/5/23</a:t>
+              <a:t>2025/5/24</a:t>
             </a:fld>
             <a:endParaRPr lang="zh-TW" altLang="en-US"/>
           </a:p>
@@ -2909,7 +3346,7 @@
           <a:p>
             <a:fld id="{1D26FEFA-CABF-4D3E-B0D4-C9C601D1E998}" type="datetimeFigureOut">
               <a:rPr lang="zh-TW" altLang="en-US" smtClean="0"/>
-              <a:t>2025/5/23</a:t>
+              <a:t>2025/5/24</a:t>
             </a:fld>
             <a:endParaRPr lang="zh-TW" altLang="en-US"/>
           </a:p>
@@ -3312,6 +3749,924 @@
 <file path=ppt/slides/slide1.xml><?xml version="1.0" encoding="utf-8"?>
 <p:sld xmlns:a="http://schemas.openxmlformats.org/drawingml/2006/main" xmlns:r="http://schemas.openxmlformats.org/officeDocument/2006/relationships" xmlns:p="http://schemas.openxmlformats.org/presentationml/2006/main">
   <p:cSld>
+    <p:bg>
+      <p:bgPr>
+        <a:blipFill dpi="0" rotWithShape="1">
+          <a:blip r:embed="rId3">
+            <a:lum/>
+          </a:blip>
+          <a:srcRect/>
+          <a:stretch>
+            <a:fillRect t="-9000" b="-9000"/>
+          </a:stretch>
+        </a:blipFill>
+        <a:effectLst/>
+      </p:bgPr>
+    </p:bg>
+    <p:spTree>
+      <p:nvGrpSpPr>
+        <p:cNvPr id="1" name=""/>
+        <p:cNvGrpSpPr/>
+        <p:nvPr/>
+      </p:nvGrpSpPr>
+      <p:grpSpPr>
+        <a:xfrm>
+          <a:off x="0" y="0"/>
+          <a:ext cx="0" cy="0"/>
+          <a:chOff x="0" y="0"/>
+          <a:chExt cx="0" cy="0"/>
+        </a:xfrm>
+      </p:grpSpPr>
+      <p:sp>
+        <p:nvSpPr>
+          <p:cNvPr id="7" name="矩形 6">
+            <a:extLst>
+              <a:ext uri="{FF2B5EF4-FFF2-40B4-BE49-F238E27FC236}">
+                <a16:creationId xmlns:a16="http://schemas.microsoft.com/office/drawing/2014/main" id="{8807616C-8964-4158-B79F-1A86DFA1F9F5}"/>
+              </a:ext>
+            </a:extLst>
+          </p:cNvPr>
+          <p:cNvSpPr/>
+          <p:nvPr/>
+        </p:nvSpPr>
+        <p:spPr>
+          <a:xfrm>
+            <a:off x="0" y="0"/>
+            <a:ext cx="12192000" cy="6858000"/>
+          </a:xfrm>
+          <a:prstGeom prst="rect">
+            <a:avLst/>
+          </a:prstGeom>
+          <a:gradFill flip="none" rotWithShape="1">
+            <a:gsLst>
+              <a:gs pos="0">
+                <a:schemeClr val="tx1">
+                  <a:alpha val="60000"/>
+                </a:schemeClr>
+              </a:gs>
+              <a:gs pos="100000">
+                <a:schemeClr val="bg1">
+                  <a:lumMod val="80000"/>
+                  <a:alpha val="40000"/>
+                </a:schemeClr>
+              </a:gs>
+            </a:gsLst>
+            <a:lin ang="18900000" scaled="1"/>
+            <a:tileRect/>
+          </a:gradFill>
+          <a:ln>
+            <a:noFill/>
+          </a:ln>
+        </p:spPr>
+        <p:style>
+          <a:lnRef idx="2">
+            <a:schemeClr val="accent1">
+              <a:shade val="50000"/>
+            </a:schemeClr>
+          </a:lnRef>
+          <a:fillRef idx="1">
+            <a:schemeClr val="accent1"/>
+          </a:fillRef>
+          <a:effectRef idx="0">
+            <a:schemeClr val="accent1"/>
+          </a:effectRef>
+          <a:fontRef idx="minor">
+            <a:schemeClr val="lt1"/>
+          </a:fontRef>
+        </p:style>
+        <p:txBody>
+          <a:bodyPr rtlCol="0" anchor="ctr"/>
+          <a:lstStyle/>
+          <a:p>
+            <a:pPr algn="ctr"/>
+            <a:endParaRPr lang="zh-TW" altLang="en-US"/>
+          </a:p>
+        </p:txBody>
+      </p:sp>
+      <p:sp>
+        <p:nvSpPr>
+          <p:cNvPr id="5" name="手繪多邊形: 圖案 4">
+            <a:extLst>
+              <a:ext uri="{FF2B5EF4-FFF2-40B4-BE49-F238E27FC236}">
+                <a16:creationId xmlns:a16="http://schemas.microsoft.com/office/drawing/2014/main" id="{B4EE9699-E3B1-4E10-A1A0-4288D705794F}"/>
+              </a:ext>
+            </a:extLst>
+          </p:cNvPr>
+          <p:cNvSpPr/>
+          <p:nvPr/>
+        </p:nvSpPr>
+        <p:spPr>
+          <a:xfrm>
+            <a:off x="-1053887" y="-1549830"/>
+            <a:ext cx="12507132" cy="5966848"/>
+          </a:xfrm>
+          <a:custGeom>
+            <a:avLst/>
+            <a:gdLst>
+              <a:gd name="connsiteX0" fmla="*/ 10228881 w 10228881"/>
+              <a:gd name="connsiteY0" fmla="*/ 371960 h 4928461"/>
+              <a:gd name="connsiteX1" fmla="*/ 0 w 10228881"/>
+              <a:gd name="connsiteY1" fmla="*/ 4928461 h 4928461"/>
+              <a:gd name="connsiteX2" fmla="*/ 247973 w 10228881"/>
+              <a:gd name="connsiteY2" fmla="*/ 0 h 4928461"/>
+              <a:gd name="connsiteX3" fmla="*/ 10228881 w 10228881"/>
+              <a:gd name="connsiteY3" fmla="*/ 371960 h 4928461"/>
+            </a:gdLst>
+            <a:ahLst/>
+            <a:cxnLst>
+              <a:cxn ang="0">
+                <a:pos x="connsiteX0" y="connsiteY0"/>
+              </a:cxn>
+              <a:cxn ang="0">
+                <a:pos x="connsiteX1" y="connsiteY1"/>
+              </a:cxn>
+              <a:cxn ang="0">
+                <a:pos x="connsiteX2" y="connsiteY2"/>
+              </a:cxn>
+              <a:cxn ang="0">
+                <a:pos x="connsiteX3" y="connsiteY3"/>
+              </a:cxn>
+            </a:cxnLst>
+            <a:rect l="l" t="t" r="r" b="b"/>
+            <a:pathLst>
+              <a:path w="10228881" h="4928461">
+                <a:moveTo>
+                  <a:pt x="10228881" y="371960"/>
+                </a:moveTo>
+                <a:lnTo>
+                  <a:pt x="0" y="4928461"/>
+                </a:lnTo>
+                <a:lnTo>
+                  <a:pt x="247973" y="0"/>
+                </a:lnTo>
+                <a:lnTo>
+                  <a:pt x="10228881" y="371960"/>
+                </a:lnTo>
+                <a:close/>
+              </a:path>
+            </a:pathLst>
+          </a:custGeom>
+          <a:solidFill>
+            <a:schemeClr val="tx1">
+              <a:alpha val="75000"/>
+            </a:schemeClr>
+          </a:solidFill>
+          <a:effectLst>
+            <a:softEdge rad="317500"/>
+          </a:effectLst>
+        </p:spPr>
+        <p:style>
+          <a:lnRef idx="2">
+            <a:schemeClr val="accent1">
+              <a:shade val="50000"/>
+            </a:schemeClr>
+          </a:lnRef>
+          <a:fillRef idx="1">
+            <a:schemeClr val="accent1"/>
+          </a:fillRef>
+          <a:effectRef idx="0">
+            <a:schemeClr val="accent1"/>
+          </a:effectRef>
+          <a:fontRef idx="minor">
+            <a:schemeClr val="lt1"/>
+          </a:fontRef>
+        </p:style>
+        <p:txBody>
+          <a:bodyPr rtlCol="0" anchor="ctr"/>
+          <a:lstStyle/>
+          <a:p>
+            <a:pPr algn="ctr"/>
+            <a:endParaRPr lang="zh-TW" altLang="en-US"/>
+          </a:p>
+        </p:txBody>
+      </p:sp>
+      <p:sp>
+        <p:nvSpPr>
+          <p:cNvPr id="6" name="手繪多邊形: 圖案 5">
+            <a:extLst>
+              <a:ext uri="{FF2B5EF4-FFF2-40B4-BE49-F238E27FC236}">
+                <a16:creationId xmlns:a16="http://schemas.microsoft.com/office/drawing/2014/main" id="{CCE35446-67A9-4CC2-8BA7-C7765B997FFE}"/>
+              </a:ext>
+            </a:extLst>
+          </p:cNvPr>
+          <p:cNvSpPr/>
+          <p:nvPr/>
+        </p:nvSpPr>
+        <p:spPr>
+          <a:xfrm>
+            <a:off x="6323308" y="3130657"/>
+            <a:ext cx="6958740" cy="4994329"/>
+          </a:xfrm>
+          <a:custGeom>
+            <a:avLst/>
+            <a:gdLst>
+              <a:gd name="connsiteX0" fmla="*/ 4866468 w 4866468"/>
+              <a:gd name="connsiteY0" fmla="*/ 0 h 3347634"/>
+              <a:gd name="connsiteX1" fmla="*/ 0 w 4866468"/>
+              <a:gd name="connsiteY1" fmla="*/ 3347634 h 3347634"/>
+              <a:gd name="connsiteX2" fmla="*/ 4649492 w 4866468"/>
+              <a:gd name="connsiteY2" fmla="*/ 3347634 h 3347634"/>
+              <a:gd name="connsiteX3" fmla="*/ 4866468 w 4866468"/>
+              <a:gd name="connsiteY3" fmla="*/ 0 h 3347634"/>
+            </a:gdLst>
+            <a:ahLst/>
+            <a:cxnLst>
+              <a:cxn ang="0">
+                <a:pos x="connsiteX0" y="connsiteY0"/>
+              </a:cxn>
+              <a:cxn ang="0">
+                <a:pos x="connsiteX1" y="connsiteY1"/>
+              </a:cxn>
+              <a:cxn ang="0">
+                <a:pos x="connsiteX2" y="connsiteY2"/>
+              </a:cxn>
+              <a:cxn ang="0">
+                <a:pos x="connsiteX3" y="connsiteY3"/>
+              </a:cxn>
+            </a:cxnLst>
+            <a:rect l="l" t="t" r="r" b="b"/>
+            <a:pathLst>
+              <a:path w="4866468" h="3347634">
+                <a:moveTo>
+                  <a:pt x="4866468" y="0"/>
+                </a:moveTo>
+                <a:lnTo>
+                  <a:pt x="0" y="3347634"/>
+                </a:lnTo>
+                <a:lnTo>
+                  <a:pt x="4649492" y="3347634"/>
+                </a:lnTo>
+                <a:lnTo>
+                  <a:pt x="4866468" y="0"/>
+                </a:lnTo>
+                <a:close/>
+              </a:path>
+            </a:pathLst>
+          </a:custGeom>
+          <a:solidFill>
+            <a:schemeClr val="tx1">
+              <a:alpha val="75000"/>
+            </a:schemeClr>
+          </a:solidFill>
+          <a:effectLst>
+            <a:softEdge rad="317500"/>
+          </a:effectLst>
+        </p:spPr>
+        <p:style>
+          <a:lnRef idx="2">
+            <a:schemeClr val="accent1">
+              <a:shade val="50000"/>
+            </a:schemeClr>
+          </a:lnRef>
+          <a:fillRef idx="1">
+            <a:schemeClr val="accent1"/>
+          </a:fillRef>
+          <a:effectRef idx="0">
+            <a:schemeClr val="accent1"/>
+          </a:effectRef>
+          <a:fontRef idx="minor">
+            <a:schemeClr val="lt1"/>
+          </a:fontRef>
+        </p:style>
+        <p:txBody>
+          <a:bodyPr rtlCol="0" anchor="ctr"/>
+          <a:lstStyle/>
+          <a:p>
+            <a:pPr algn="ctr"/>
+            <a:endParaRPr lang="zh-TW" altLang="en-US"/>
+          </a:p>
+        </p:txBody>
+      </p:sp>
+      <p:cxnSp>
+        <p:nvCxnSpPr>
+          <p:cNvPr id="9" name="直線接點 8">
+            <a:extLst>
+              <a:ext uri="{FF2B5EF4-FFF2-40B4-BE49-F238E27FC236}">
+                <a16:creationId xmlns:a16="http://schemas.microsoft.com/office/drawing/2014/main" id="{131F6A48-9FB6-4961-819D-F8475F0417E6}"/>
+              </a:ext>
+            </a:extLst>
+          </p:cNvPr>
+          <p:cNvCxnSpPr/>
+          <p:nvPr/>
+        </p:nvCxnSpPr>
+        <p:spPr>
+          <a:xfrm>
+            <a:off x="6723767" y="2867186"/>
+            <a:ext cx="2603716" cy="0"/>
+          </a:xfrm>
+          <a:prstGeom prst="line">
+            <a:avLst/>
+          </a:prstGeom>
+          <a:ln w="28575">
+            <a:gradFill>
+              <a:gsLst>
+                <a:gs pos="0">
+                  <a:schemeClr val="accent4"/>
+                </a:gs>
+                <a:gs pos="75000">
+                  <a:schemeClr val="bg1"/>
+                </a:gs>
+                <a:gs pos="25000">
+                  <a:schemeClr val="bg1"/>
+                </a:gs>
+                <a:gs pos="100000">
+                  <a:schemeClr val="accent4"/>
+                </a:gs>
+              </a:gsLst>
+              <a:lin ang="5400000" scaled="1"/>
+            </a:gradFill>
+          </a:ln>
+          <a:effectLst>
+            <a:glow rad="228600">
+              <a:schemeClr val="accent4">
+                <a:satMod val="175000"/>
+                <a:alpha val="40000"/>
+              </a:schemeClr>
+            </a:glow>
+            <a:softEdge rad="0"/>
+          </a:effectLst>
+        </p:spPr>
+        <p:style>
+          <a:lnRef idx="1">
+            <a:schemeClr val="accent1"/>
+          </a:lnRef>
+          <a:fillRef idx="0">
+            <a:schemeClr val="accent1"/>
+          </a:fillRef>
+          <a:effectRef idx="0">
+            <a:schemeClr val="accent1"/>
+          </a:effectRef>
+          <a:fontRef idx="minor">
+            <a:schemeClr val="tx1"/>
+          </a:fontRef>
+        </p:style>
+      </p:cxnSp>
+      <p:pic>
+        <p:nvPicPr>
+          <p:cNvPr id="15" name="圖形 14">
+            <a:extLst>
+              <a:ext uri="{FF2B5EF4-FFF2-40B4-BE49-F238E27FC236}">
+                <a16:creationId xmlns:a16="http://schemas.microsoft.com/office/drawing/2014/main" id="{6BE3E38F-13B5-479B-B17B-027DCE7D2064}"/>
+              </a:ext>
+            </a:extLst>
+          </p:cNvPr>
+          <p:cNvPicPr>
+            <a:picLocks noChangeAspect="1"/>
+          </p:cNvPicPr>
+          <p:nvPr/>
+        </p:nvPicPr>
+        <p:blipFill rotWithShape="1">
+          <a:blip r:embed="rId4">
+            <a:extLst>
+              <a:ext uri="{28A0092B-C50C-407E-A947-70E740481C1C}">
+                <a14:useLocalDpi xmlns:a14="http://schemas.microsoft.com/office/drawing/2010/main" val="0"/>
+              </a:ext>
+              <a:ext uri="{96DAC541-7B7A-43D3-8B79-37D633B846F1}">
+                <asvg:svgBlip xmlns:asvg="http://schemas.microsoft.com/office/drawing/2016/SVG/main" r:embed="rId5"/>
+              </a:ext>
+            </a:extLst>
+          </a:blip>
+          <a:srcRect l="11029" t="5123" r="33087" b="77937"/>
+          <a:stretch/>
+        </p:blipFill>
+        <p:spPr>
+          <a:xfrm>
+            <a:off x="8526721" y="-35093"/>
+            <a:ext cx="1950804" cy="2379303"/>
+          </a:xfrm>
+          <a:prstGeom prst="rect">
+            <a:avLst/>
+          </a:prstGeom>
+          <a:effectLst>
+            <a:outerShdw blurRad="50800" dist="38100" sx="110000" sy="110000" algn="l" rotWithShape="0">
+              <a:prstClr val="black">
+                <a:alpha val="40000"/>
+              </a:prstClr>
+            </a:outerShdw>
+          </a:effectLst>
+        </p:spPr>
+      </p:pic>
+      <p:pic>
+        <p:nvPicPr>
+          <p:cNvPr id="18" name="圖形 17">
+            <a:extLst>
+              <a:ext uri="{FF2B5EF4-FFF2-40B4-BE49-F238E27FC236}">
+                <a16:creationId xmlns:a16="http://schemas.microsoft.com/office/drawing/2014/main" id="{A4376A24-6DFB-4CB9-A4F0-CCD12FB92034}"/>
+              </a:ext>
+            </a:extLst>
+          </p:cNvPr>
+          <p:cNvPicPr>
+            <a:picLocks noChangeAspect="1"/>
+          </p:cNvPicPr>
+          <p:nvPr/>
+        </p:nvPicPr>
+        <p:blipFill rotWithShape="1">
+          <a:blip r:embed="rId6">
+            <a:extLst>
+              <a:ext uri="{28A0092B-C50C-407E-A947-70E740481C1C}">
+                <a14:useLocalDpi xmlns:a14="http://schemas.microsoft.com/office/drawing/2010/main" val="0"/>
+              </a:ext>
+              <a:ext uri="{96DAC541-7B7A-43D3-8B79-37D633B846F1}">
+                <asvg:svgBlip xmlns:asvg="http://schemas.microsoft.com/office/drawing/2016/SVG/main" r:embed="rId7"/>
+              </a:ext>
+            </a:extLst>
+          </a:blip>
+          <a:srcRect t="52639" b="27691"/>
+          <a:stretch/>
+        </p:blipFill>
+        <p:spPr>
+          <a:xfrm>
+            <a:off x="9286007" y="3330553"/>
+            <a:ext cx="2305775" cy="1824843"/>
+          </a:xfrm>
+          <a:prstGeom prst="rect">
+            <a:avLst/>
+          </a:prstGeom>
+          <a:effectLst>
+            <a:outerShdw blurRad="50800" dist="38100" dir="2700000" sx="110000" sy="110000" algn="tl" rotWithShape="0">
+              <a:prstClr val="black">
+                <a:alpha val="40000"/>
+              </a:prstClr>
+            </a:outerShdw>
+          </a:effectLst>
+        </p:spPr>
+      </p:pic>
+      <p:pic>
+        <p:nvPicPr>
+          <p:cNvPr id="19" name="圖形 18">
+            <a:extLst>
+              <a:ext uri="{FF2B5EF4-FFF2-40B4-BE49-F238E27FC236}">
+                <a16:creationId xmlns:a16="http://schemas.microsoft.com/office/drawing/2014/main" id="{CD54FF34-2AEF-4F35-8C91-568E2FB97B57}"/>
+              </a:ext>
+            </a:extLst>
+          </p:cNvPr>
+          <p:cNvPicPr>
+            <a:picLocks noChangeAspect="1"/>
+          </p:cNvPicPr>
+          <p:nvPr/>
+        </p:nvPicPr>
+        <p:blipFill rotWithShape="1">
+          <a:blip r:embed="rId8">
+            <a:extLst>
+              <a:ext uri="{28A0092B-C50C-407E-A947-70E740481C1C}">
+                <a14:useLocalDpi xmlns:a14="http://schemas.microsoft.com/office/drawing/2010/main" val="0"/>
+              </a:ext>
+              <a:ext uri="{96DAC541-7B7A-43D3-8B79-37D633B846F1}">
+                <asvg:svgBlip xmlns:asvg="http://schemas.microsoft.com/office/drawing/2016/SVG/main" r:embed="rId9"/>
+              </a:ext>
+            </a:extLst>
+          </a:blip>
+          <a:srcRect t="27549" b="53506"/>
+          <a:stretch/>
+        </p:blipFill>
+        <p:spPr>
+          <a:xfrm>
+            <a:off x="10003605" y="1700136"/>
+            <a:ext cx="2188395" cy="1668202"/>
+          </a:xfrm>
+          <a:prstGeom prst="rect">
+            <a:avLst/>
+          </a:prstGeom>
+          <a:effectLst>
+            <a:outerShdw blurRad="50800" dist="38100" dir="2700000" sx="110000" sy="110000" algn="tl" rotWithShape="0">
+              <a:prstClr val="black">
+                <a:alpha val="40000"/>
+              </a:prstClr>
+            </a:outerShdw>
+          </a:effectLst>
+        </p:spPr>
+      </p:pic>
+      <p:sp>
+        <p:nvSpPr>
+          <p:cNvPr id="20" name="文字方塊 19">
+            <a:extLst>
+              <a:ext uri="{FF2B5EF4-FFF2-40B4-BE49-F238E27FC236}">
+                <a16:creationId xmlns:a16="http://schemas.microsoft.com/office/drawing/2014/main" id="{B732999E-3DDE-4AFF-AB74-6C27173BB8A8}"/>
+              </a:ext>
+            </a:extLst>
+          </p:cNvPr>
+          <p:cNvSpPr txBox="1"/>
+          <p:nvPr/>
+        </p:nvSpPr>
+        <p:spPr>
+          <a:xfrm>
+            <a:off x="6710358" y="3130657"/>
+            <a:ext cx="2118927" cy="1200329"/>
+          </a:xfrm>
+          <a:prstGeom prst="rect">
+            <a:avLst/>
+          </a:prstGeom>
+          <a:noFill/>
+        </p:spPr>
+        <p:txBody>
+          <a:bodyPr wrap="square" rtlCol="0">
+            <a:spAutoFit/>
+          </a:bodyPr>
+          <a:lstStyle/>
+          <a:p>
+            <a:r>
+              <a:rPr lang="zh-TW" altLang="en-US" sz="3600" dirty="0">
+                <a:gradFill flip="none" rotWithShape="1">
+                  <a:gsLst>
+                    <a:gs pos="0">
+                      <a:srgbClr val="FEE140"/>
+                    </a:gs>
+                    <a:gs pos="100000">
+                      <a:srgbClr val="FDA085"/>
+                    </a:gs>
+                  </a:gsLst>
+                  <a:lin ang="0" scaled="1"/>
+                  <a:tileRect/>
+                </a:gradFill>
+                <a:effectLst>
+                  <a:outerShdw blurRad="38100" dist="38100" dir="2700000" algn="tl">
+                    <a:srgbClr val="000000"/>
+                  </a:outerShdw>
+                </a:effectLst>
+                <a:latin typeface="標楷體" panose="03000509000000000000" pitchFamily="65" charset="-120"/>
+                <a:ea typeface="標楷體" panose="03000509000000000000" pitchFamily="65" charset="-120"/>
+              </a:rPr>
+              <a:t>台灣歷史</a:t>
+            </a:r>
+            <a:endParaRPr lang="en-US" altLang="zh-TW" sz="3600" dirty="0">
+              <a:gradFill flip="none" rotWithShape="1">
+                <a:gsLst>
+                  <a:gs pos="0">
+                    <a:srgbClr val="FEE140"/>
+                  </a:gs>
+                  <a:gs pos="100000">
+                    <a:srgbClr val="FDA085"/>
+                  </a:gs>
+                </a:gsLst>
+                <a:lin ang="0" scaled="1"/>
+                <a:tileRect/>
+              </a:gradFill>
+              <a:effectLst>
+                <a:outerShdw blurRad="38100" dist="38100" dir="2700000" algn="tl">
+                  <a:srgbClr val="000000"/>
+                </a:outerShdw>
+              </a:effectLst>
+              <a:latin typeface="標楷體" panose="03000509000000000000" pitchFamily="65" charset="-120"/>
+              <a:ea typeface="標楷體" panose="03000509000000000000" pitchFamily="65" charset="-120"/>
+            </a:endParaRPr>
+          </a:p>
+          <a:p>
+            <a:r>
+              <a:rPr lang="zh-TW" altLang="en-US" sz="3600" dirty="0">
+                <a:gradFill flip="none" rotWithShape="1">
+                  <a:gsLst>
+                    <a:gs pos="0">
+                      <a:srgbClr val="FEE140"/>
+                    </a:gs>
+                    <a:gs pos="100000">
+                      <a:srgbClr val="FDA085"/>
+                    </a:gs>
+                  </a:gsLst>
+                  <a:lin ang="0" scaled="1"/>
+                  <a:tileRect/>
+                </a:gradFill>
+                <a:effectLst>
+                  <a:outerShdw blurRad="38100" dist="38100" dir="2700000" algn="tl">
+                    <a:srgbClr val="000000"/>
+                  </a:outerShdw>
+                </a:effectLst>
+                <a:latin typeface="標楷體" panose="03000509000000000000" pitchFamily="65" charset="-120"/>
+                <a:ea typeface="標楷體" panose="03000509000000000000" pitchFamily="65" charset="-120"/>
+              </a:rPr>
+              <a:t>乘</a:t>
+            </a:r>
+            <a:r>
+              <a:rPr lang="zh-TW" altLang="en-US" sz="3600" dirty="0">
+                <a:gradFill>
+                  <a:gsLst>
+                    <a:gs pos="0">
+                      <a:srgbClr val="FEE140"/>
+                    </a:gs>
+                    <a:gs pos="100000">
+                      <a:srgbClr val="FDA085"/>
+                    </a:gs>
+                  </a:gsLst>
+                  <a:lin ang="0" scaled="0"/>
+                </a:gradFill>
+                <a:effectLst>
+                  <a:outerShdw blurRad="38100" dist="38100" dir="2700000" algn="tl">
+                    <a:srgbClr val="000000"/>
+                  </a:outerShdw>
+                </a:effectLst>
+                <a:latin typeface="標楷體" panose="03000509000000000000" pitchFamily="65" charset="-120"/>
+                <a:ea typeface="標楷體" panose="03000509000000000000" pitchFamily="65" charset="-120"/>
+              </a:rPr>
+              <a:t>載悠久</a:t>
+            </a:r>
+          </a:p>
+        </p:txBody>
+      </p:sp>
+      <p:sp>
+        <p:nvSpPr>
+          <p:cNvPr id="22" name="文字方塊 21">
+            <a:extLst>
+              <a:ext uri="{FF2B5EF4-FFF2-40B4-BE49-F238E27FC236}">
+                <a16:creationId xmlns:a16="http://schemas.microsoft.com/office/drawing/2014/main" id="{84E3BB03-7B0B-4020-A375-E2812A70ADEB}"/>
+              </a:ext>
+            </a:extLst>
+          </p:cNvPr>
+          <p:cNvSpPr txBox="1"/>
+          <p:nvPr/>
+        </p:nvSpPr>
+        <p:spPr>
+          <a:xfrm>
+            <a:off x="8725998" y="3057059"/>
+            <a:ext cx="595035" cy="3046988"/>
+          </a:xfrm>
+          <a:prstGeom prst="rect">
+            <a:avLst/>
+          </a:prstGeom>
+          <a:noFill/>
+        </p:spPr>
+        <p:txBody>
+          <a:bodyPr wrap="none" rtlCol="0">
+            <a:spAutoFit/>
+          </a:bodyPr>
+          <a:lstStyle/>
+          <a:p>
+            <a:r>
+              <a:rPr lang="zh-TW" altLang="en-US" sz="3200" dirty="0">
+                <a:gradFill flip="none" rotWithShape="1">
+                  <a:gsLst>
+                    <a:gs pos="0">
+                      <a:srgbClr val="FEE140"/>
+                    </a:gs>
+                    <a:gs pos="90000">
+                      <a:srgbClr val="FC805E"/>
+                    </a:gs>
+                  </a:gsLst>
+                  <a:lin ang="5400000" scaled="1"/>
+                  <a:tileRect/>
+                </a:gradFill>
+                <a:effectLst>
+                  <a:outerShdw blurRad="38100" dist="38100" dir="2700000" algn="tl">
+                    <a:srgbClr val="000000"/>
+                  </a:outerShdw>
+                </a:effectLst>
+                <a:latin typeface="標楷體" panose="03000509000000000000" pitchFamily="65" charset="-120"/>
+                <a:ea typeface="標楷體" panose="03000509000000000000" pitchFamily="65" charset="-120"/>
+              </a:rPr>
+              <a:t>中</a:t>
+            </a:r>
+            <a:endParaRPr lang="en-US" altLang="zh-TW" sz="3200" dirty="0">
+              <a:gradFill flip="none" rotWithShape="1">
+                <a:gsLst>
+                  <a:gs pos="0">
+                    <a:srgbClr val="FEE140"/>
+                  </a:gs>
+                  <a:gs pos="90000">
+                    <a:srgbClr val="FC805E"/>
+                  </a:gs>
+                </a:gsLst>
+                <a:lin ang="5400000" scaled="1"/>
+                <a:tileRect/>
+              </a:gradFill>
+              <a:effectLst>
+                <a:outerShdw blurRad="38100" dist="38100" dir="2700000" algn="tl">
+                  <a:srgbClr val="000000"/>
+                </a:outerShdw>
+              </a:effectLst>
+              <a:latin typeface="標楷體" panose="03000509000000000000" pitchFamily="65" charset="-120"/>
+              <a:ea typeface="標楷體" panose="03000509000000000000" pitchFamily="65" charset="-120"/>
+            </a:endParaRPr>
+          </a:p>
+          <a:p>
+            <a:r>
+              <a:rPr lang="zh-TW" altLang="en-US" sz="3200" dirty="0">
+                <a:gradFill flip="none" rotWithShape="1">
+                  <a:gsLst>
+                    <a:gs pos="0">
+                      <a:srgbClr val="FEE140"/>
+                    </a:gs>
+                    <a:gs pos="90000">
+                      <a:srgbClr val="FC805E"/>
+                    </a:gs>
+                  </a:gsLst>
+                  <a:lin ang="5400000" scaled="1"/>
+                  <a:tileRect/>
+                </a:gradFill>
+                <a:effectLst>
+                  <a:outerShdw blurRad="38100" dist="38100" dir="2700000" algn="tl">
+                    <a:srgbClr val="000000"/>
+                  </a:outerShdw>
+                </a:effectLst>
+                <a:latin typeface="標楷體" panose="03000509000000000000" pitchFamily="65" charset="-120"/>
+                <a:ea typeface="標楷體" panose="03000509000000000000" pitchFamily="65" charset="-120"/>
+              </a:rPr>
+              <a:t>華</a:t>
+            </a:r>
+            <a:endParaRPr lang="en-US" altLang="zh-TW" sz="3200" dirty="0">
+              <a:gradFill flip="none" rotWithShape="1">
+                <a:gsLst>
+                  <a:gs pos="0">
+                    <a:srgbClr val="FEE140"/>
+                  </a:gs>
+                  <a:gs pos="90000">
+                    <a:srgbClr val="FC805E"/>
+                  </a:gs>
+                </a:gsLst>
+                <a:lin ang="5400000" scaled="1"/>
+                <a:tileRect/>
+              </a:gradFill>
+              <a:effectLst>
+                <a:outerShdw blurRad="38100" dist="38100" dir="2700000" algn="tl">
+                  <a:srgbClr val="000000"/>
+                </a:outerShdw>
+              </a:effectLst>
+              <a:latin typeface="標楷體" panose="03000509000000000000" pitchFamily="65" charset="-120"/>
+              <a:ea typeface="標楷體" panose="03000509000000000000" pitchFamily="65" charset="-120"/>
+            </a:endParaRPr>
+          </a:p>
+          <a:p>
+            <a:r>
+              <a:rPr lang="zh-TW" altLang="en-US" sz="3200" dirty="0">
+                <a:gradFill flip="none" rotWithShape="1">
+                  <a:gsLst>
+                    <a:gs pos="0">
+                      <a:srgbClr val="FEE140"/>
+                    </a:gs>
+                    <a:gs pos="90000">
+                      <a:srgbClr val="FC805E"/>
+                    </a:gs>
+                  </a:gsLst>
+                  <a:lin ang="5400000" scaled="1"/>
+                  <a:tileRect/>
+                </a:gradFill>
+                <a:effectLst>
+                  <a:outerShdw blurRad="38100" dist="38100" dir="2700000" algn="tl">
+                    <a:srgbClr val="000000"/>
+                  </a:outerShdw>
+                </a:effectLst>
+                <a:latin typeface="標楷體" panose="03000509000000000000" pitchFamily="65" charset="-120"/>
+                <a:ea typeface="標楷體" panose="03000509000000000000" pitchFamily="65" charset="-120"/>
+              </a:rPr>
+              <a:t>文</a:t>
+            </a:r>
+            <a:endParaRPr lang="en-US" altLang="zh-TW" sz="3200" dirty="0">
+              <a:gradFill flip="none" rotWithShape="1">
+                <a:gsLst>
+                  <a:gs pos="0">
+                    <a:srgbClr val="FEE140"/>
+                  </a:gs>
+                  <a:gs pos="90000">
+                    <a:srgbClr val="FC805E"/>
+                  </a:gs>
+                </a:gsLst>
+                <a:lin ang="5400000" scaled="1"/>
+                <a:tileRect/>
+              </a:gradFill>
+              <a:effectLst>
+                <a:outerShdw blurRad="38100" dist="38100" dir="2700000" algn="tl">
+                  <a:srgbClr val="000000"/>
+                </a:outerShdw>
+              </a:effectLst>
+              <a:latin typeface="標楷體" panose="03000509000000000000" pitchFamily="65" charset="-120"/>
+              <a:ea typeface="標楷體" panose="03000509000000000000" pitchFamily="65" charset="-120"/>
+            </a:endParaRPr>
+          </a:p>
+          <a:p>
+            <a:r>
+              <a:rPr lang="zh-TW" altLang="en-US" sz="3200" dirty="0">
+                <a:gradFill flip="none" rotWithShape="1">
+                  <a:gsLst>
+                    <a:gs pos="0">
+                      <a:srgbClr val="FEE140"/>
+                    </a:gs>
+                    <a:gs pos="90000">
+                      <a:srgbClr val="FC805E"/>
+                    </a:gs>
+                  </a:gsLst>
+                  <a:lin ang="5400000" scaled="1"/>
+                  <a:tileRect/>
+                </a:gradFill>
+                <a:effectLst>
+                  <a:outerShdw blurRad="38100" dist="38100" dir="2700000" algn="tl">
+                    <a:srgbClr val="000000"/>
+                  </a:outerShdw>
+                </a:effectLst>
+                <a:latin typeface="標楷體" panose="03000509000000000000" pitchFamily="65" charset="-120"/>
+                <a:ea typeface="標楷體" panose="03000509000000000000" pitchFamily="65" charset="-120"/>
+              </a:rPr>
+              <a:t>化</a:t>
+            </a:r>
+            <a:endParaRPr lang="en-US" altLang="zh-TW" sz="3200" dirty="0">
+              <a:gradFill flip="none" rotWithShape="1">
+                <a:gsLst>
+                  <a:gs pos="0">
+                    <a:srgbClr val="FEE140"/>
+                  </a:gs>
+                  <a:gs pos="90000">
+                    <a:srgbClr val="FC805E"/>
+                  </a:gs>
+                </a:gsLst>
+                <a:lin ang="5400000" scaled="1"/>
+                <a:tileRect/>
+              </a:gradFill>
+              <a:effectLst>
+                <a:outerShdw blurRad="38100" dist="38100" dir="2700000" algn="tl">
+                  <a:srgbClr val="000000"/>
+                </a:outerShdw>
+              </a:effectLst>
+              <a:latin typeface="標楷體" panose="03000509000000000000" pitchFamily="65" charset="-120"/>
+              <a:ea typeface="標楷體" panose="03000509000000000000" pitchFamily="65" charset="-120"/>
+            </a:endParaRPr>
+          </a:p>
+          <a:p>
+            <a:r>
+              <a:rPr lang="zh-TW" altLang="en-US" sz="3200" dirty="0">
+                <a:gradFill flip="none" rotWithShape="1">
+                  <a:gsLst>
+                    <a:gs pos="0">
+                      <a:srgbClr val="FEE140"/>
+                    </a:gs>
+                    <a:gs pos="90000">
+                      <a:srgbClr val="FC805E"/>
+                    </a:gs>
+                  </a:gsLst>
+                  <a:lin ang="5400000" scaled="1"/>
+                  <a:tileRect/>
+                </a:gradFill>
+                <a:effectLst>
+                  <a:outerShdw blurRad="38100" dist="38100" dir="2700000" algn="tl">
+                    <a:srgbClr val="000000"/>
+                  </a:outerShdw>
+                </a:effectLst>
+                <a:latin typeface="標楷體" panose="03000509000000000000" pitchFamily="65" charset="-120"/>
+                <a:ea typeface="標楷體" panose="03000509000000000000" pitchFamily="65" charset="-120"/>
+              </a:rPr>
+              <a:t>之</a:t>
+            </a:r>
+            <a:endParaRPr lang="en-US" altLang="zh-TW" sz="3200" dirty="0">
+              <a:gradFill flip="none" rotWithShape="1">
+                <a:gsLst>
+                  <a:gs pos="0">
+                    <a:srgbClr val="FEE140"/>
+                  </a:gs>
+                  <a:gs pos="90000">
+                    <a:srgbClr val="FC805E"/>
+                  </a:gs>
+                </a:gsLst>
+                <a:lin ang="5400000" scaled="1"/>
+                <a:tileRect/>
+              </a:gradFill>
+              <a:effectLst>
+                <a:outerShdw blurRad="38100" dist="38100" dir="2700000" algn="tl">
+                  <a:srgbClr val="000000"/>
+                </a:outerShdw>
+              </a:effectLst>
+              <a:latin typeface="標楷體" panose="03000509000000000000" pitchFamily="65" charset="-120"/>
+              <a:ea typeface="標楷體" panose="03000509000000000000" pitchFamily="65" charset="-120"/>
+            </a:endParaRPr>
+          </a:p>
+          <a:p>
+            <a:r>
+              <a:rPr lang="zh-TW" altLang="en-US" sz="3200" dirty="0">
+                <a:gradFill flip="none" rotWithShape="1">
+                  <a:gsLst>
+                    <a:gs pos="0">
+                      <a:srgbClr val="FEE140"/>
+                    </a:gs>
+                    <a:gs pos="90000">
+                      <a:srgbClr val="FC805E"/>
+                    </a:gs>
+                  </a:gsLst>
+                  <a:lin ang="5400000" scaled="1"/>
+                  <a:tileRect/>
+                </a:gradFill>
+                <a:effectLst>
+                  <a:outerShdw blurRad="38100" dist="38100" dir="2700000" algn="tl">
+                    <a:srgbClr val="000000"/>
+                  </a:outerShdw>
+                </a:effectLst>
+                <a:latin typeface="標楷體" panose="03000509000000000000" pitchFamily="65" charset="-120"/>
+                <a:ea typeface="標楷體" panose="03000509000000000000" pitchFamily="65" charset="-120"/>
+              </a:rPr>
+              <a:t>美</a:t>
+            </a:r>
+          </a:p>
+        </p:txBody>
+      </p:sp>
+    </p:spTree>
+    <p:extLst>
+      <p:ext uri="{BB962C8B-B14F-4D97-AF65-F5344CB8AC3E}">
+        <p14:creationId xmlns:p14="http://schemas.microsoft.com/office/powerpoint/2010/main" val="1465534740"/>
+      </p:ext>
+    </p:extLst>
+  </p:cSld>
+  <p:clrMapOvr>
+    <a:masterClrMapping/>
+  </p:clrMapOvr>
+</p:sld>
+</file>
+
+<file path=ppt/slides/slide2.xml><?xml version="1.0" encoding="utf-8"?>
+<p:sld xmlns:a="http://schemas.openxmlformats.org/drawingml/2006/main" xmlns:r="http://schemas.openxmlformats.org/officeDocument/2006/relationships" xmlns:p="http://schemas.openxmlformats.org/presentationml/2006/main">
+  <p:cSld>
     <p:spTree>
       <p:nvGrpSpPr>
         <p:cNvPr id="1" name=""/>
@@ -3329,7 +4684,7 @@
     </p:spTree>
     <p:extLst>
       <p:ext uri="{BB962C8B-B14F-4D97-AF65-F5344CB8AC3E}">
-        <p14:creationId xmlns:p14="http://schemas.microsoft.com/office/powerpoint/2010/main" val="1465534740"/>
+        <p14:creationId xmlns:p14="http://schemas.microsoft.com/office/powerpoint/2010/main" val="3925062958"/>
       </p:ext>
     </p:extLst>
   </p:cSld>
@@ -3632,4 +4987,299 @@
     </a:ext>
   </a:extLst>
 </a:theme>
+</file>
+
+<file path=ppt/theme/theme2.xml><?xml version="1.0" encoding="utf-8"?>
+<a:theme xmlns:a="http://schemas.openxmlformats.org/drawingml/2006/main" name="Office 佈景主題">
+  <a:themeElements>
+    <a:clrScheme name="Office">
+      <a:dk1>
+        <a:sysClr val="windowText" lastClr="000000"/>
+      </a:dk1>
+      <a:lt1>
+        <a:sysClr val="window" lastClr="FFFFFF"/>
+      </a:lt1>
+      <a:dk2>
+        <a:srgbClr val="44546A"/>
+      </a:dk2>
+      <a:lt2>
+        <a:srgbClr val="E7E6E6"/>
+      </a:lt2>
+      <a:accent1>
+        <a:srgbClr val="4472C4"/>
+      </a:accent1>
+      <a:accent2>
+        <a:srgbClr val="ED7D31"/>
+      </a:accent2>
+      <a:accent3>
+        <a:srgbClr val="A5A5A5"/>
+      </a:accent3>
+      <a:accent4>
+        <a:srgbClr val="FFC000"/>
+      </a:accent4>
+      <a:accent5>
+        <a:srgbClr val="5B9BD5"/>
+      </a:accent5>
+      <a:accent6>
+        <a:srgbClr val="70AD47"/>
+      </a:accent6>
+      <a:hlink>
+        <a:srgbClr val="0563C1"/>
+      </a:hlink>
+      <a:folHlink>
+        <a:srgbClr val="954F72"/>
+      </a:folHlink>
+    </a:clrScheme>
+    <a:fontScheme name="Office">
+      <a:majorFont>
+        <a:latin typeface="Calibri Light" panose="020F0302020204030204"/>
+        <a:ea typeface=""/>
+        <a:cs typeface=""/>
+        <a:font script="Jpan" typeface="游ゴシック Light"/>
+        <a:font script="Hang" typeface="맑은 고딕"/>
+        <a:font script="Hans" typeface="等线 Light"/>
+        <a:font script="Hant" typeface="新細明體"/>
+        <a:font script="Arab" typeface="Times New Roman"/>
+        <a:font script="Hebr" typeface="Times New Roman"/>
+        <a:font script="Thai" typeface="Angsana New"/>
+        <a:font script="Ethi" typeface="Nyala"/>
+        <a:font script="Beng" typeface="Vrinda"/>
+        <a:font script="Gujr" typeface="Shruti"/>
+        <a:font script="Khmr" typeface="MoolBoran"/>
+        <a:font script="Knda" typeface="Tunga"/>
+        <a:font script="Guru" typeface="Raavi"/>
+        <a:font script="Cans" typeface="Euphemia"/>
+        <a:font script="Cher" typeface="Plantagenet Cherokee"/>
+        <a:font script="Yiii" typeface="Microsoft Yi Baiti"/>
+        <a:font script="Tibt" typeface="Microsoft Himalaya"/>
+        <a:font script="Thaa" typeface="MV Boli"/>
+        <a:font script="Deva" typeface="Mangal"/>
+        <a:font script="Telu" typeface="Gautami"/>
+        <a:font script="Taml" typeface="Latha"/>
+        <a:font script="Syrc" typeface="Estrangelo Edessa"/>
+        <a:font script="Orya" typeface="Kalinga"/>
+        <a:font script="Mlym" typeface="Kartika"/>
+        <a:font script="Laoo" typeface="DokChampa"/>
+        <a:font script="Sinh" typeface="Iskoola Pota"/>
+        <a:font script="Mong" typeface="Mongolian Baiti"/>
+        <a:font script="Viet" typeface="Times New Roman"/>
+        <a:font script="Uigh" typeface="Microsoft Uighur"/>
+        <a:font script="Geor" typeface="Sylfaen"/>
+        <a:font script="Armn" typeface="Arial"/>
+        <a:font script="Bugi" typeface="Leelawadee UI"/>
+        <a:font script="Bopo" typeface="Microsoft JhengHei"/>
+        <a:font script="Java" typeface="Javanese Text"/>
+        <a:font script="Lisu" typeface="Segoe UI"/>
+        <a:font script="Mymr" typeface="Myanmar Text"/>
+        <a:font script="Nkoo" typeface="Ebrima"/>
+        <a:font script="Olck" typeface="Nirmala UI"/>
+        <a:font script="Osma" typeface="Ebrima"/>
+        <a:font script="Phag" typeface="Phagspa"/>
+        <a:font script="Syrn" typeface="Estrangelo Edessa"/>
+        <a:font script="Syrj" typeface="Estrangelo Edessa"/>
+        <a:font script="Syre" typeface="Estrangelo Edessa"/>
+        <a:font script="Sora" typeface="Nirmala UI"/>
+        <a:font script="Tale" typeface="Microsoft Tai Le"/>
+        <a:font script="Talu" typeface="Microsoft New Tai Lue"/>
+        <a:font script="Tfng" typeface="Ebrima"/>
+      </a:majorFont>
+      <a:minorFont>
+        <a:latin typeface="Calibri" panose="020F0502020204030204"/>
+        <a:ea typeface=""/>
+        <a:cs typeface=""/>
+        <a:font script="Jpan" typeface="游ゴシック"/>
+        <a:font script="Hang" typeface="맑은 고딕"/>
+        <a:font script="Hans" typeface="等线"/>
+        <a:font script="Hant" typeface="新細明體"/>
+        <a:font script="Arab" typeface="Arial"/>
+        <a:font script="Hebr" typeface="Arial"/>
+        <a:font script="Thai" typeface="Cordia New"/>
+        <a:font script="Ethi" typeface="Nyala"/>
+        <a:font script="Beng" typeface="Vrinda"/>
+        <a:font script="Gujr" typeface="Shruti"/>
+        <a:font script="Khmr" typeface="DaunPenh"/>
+        <a:font script="Knda" typeface="Tunga"/>
+        <a:font script="Guru" typeface="Raavi"/>
+        <a:font script="Cans" typeface="Euphemia"/>
+        <a:font script="Cher" typeface="Plantagenet Cherokee"/>
+        <a:font script="Yiii" typeface="Microsoft Yi Baiti"/>
+        <a:font script="Tibt" typeface="Microsoft Himalaya"/>
+        <a:font script="Thaa" typeface="MV Boli"/>
+        <a:font script="Deva" typeface="Mangal"/>
+        <a:font script="Telu" typeface="Gautami"/>
+        <a:font script="Taml" typeface="Latha"/>
+        <a:font script="Syrc" typeface="Estrangelo Edessa"/>
+        <a:font script="Orya" typeface="Kalinga"/>
+        <a:font script="Mlym" typeface="Kartika"/>
+        <a:font script="Laoo" typeface="DokChampa"/>
+        <a:font script="Sinh" typeface="Iskoola Pota"/>
+        <a:font script="Mong" typeface="Mongolian Baiti"/>
+        <a:font script="Viet" typeface="Arial"/>
+        <a:font script="Uigh" typeface="Microsoft Uighur"/>
+        <a:font script="Geor" typeface="Sylfaen"/>
+        <a:font script="Armn" typeface="Arial"/>
+        <a:font script="Bugi" typeface="Leelawadee UI"/>
+        <a:font script="Bopo" typeface="Microsoft JhengHei"/>
+        <a:font script="Java" typeface="Javanese Text"/>
+        <a:font script="Lisu" typeface="Segoe UI"/>
+        <a:font script="Mymr" typeface="Myanmar Text"/>
+        <a:font script="Nkoo" typeface="Ebrima"/>
+        <a:font script="Olck" typeface="Nirmala UI"/>
+        <a:font script="Osma" typeface="Ebrima"/>
+        <a:font script="Phag" typeface="Phagspa"/>
+        <a:font script="Syrn" typeface="Estrangelo Edessa"/>
+        <a:font script="Syrj" typeface="Estrangelo Edessa"/>
+        <a:font script="Syre" typeface="Estrangelo Edessa"/>
+        <a:font script="Sora" typeface="Nirmala UI"/>
+        <a:font script="Tale" typeface="Microsoft Tai Le"/>
+        <a:font script="Talu" typeface="Microsoft New Tai Lue"/>
+        <a:font script="Tfng" typeface="Ebrima"/>
+      </a:minorFont>
+    </a:fontScheme>
+    <a:fmtScheme name="Office">
+      <a:fillStyleLst>
+        <a:solidFill>
+          <a:schemeClr val="phClr"/>
+        </a:solidFill>
+        <a:gradFill rotWithShape="1">
+          <a:gsLst>
+            <a:gs pos="0">
+              <a:schemeClr val="phClr">
+                <a:lumMod val="110000"/>
+                <a:satMod val="105000"/>
+                <a:tint val="67000"/>
+              </a:schemeClr>
+            </a:gs>
+            <a:gs pos="50000">
+              <a:schemeClr val="phClr">
+                <a:lumMod val="105000"/>
+                <a:satMod val="103000"/>
+                <a:tint val="73000"/>
+              </a:schemeClr>
+            </a:gs>
+            <a:gs pos="100000">
+              <a:schemeClr val="phClr">
+                <a:lumMod val="105000"/>
+                <a:satMod val="109000"/>
+                <a:tint val="81000"/>
+              </a:schemeClr>
+            </a:gs>
+          </a:gsLst>
+          <a:lin ang="5400000" scaled="0"/>
+        </a:gradFill>
+        <a:gradFill rotWithShape="1">
+          <a:gsLst>
+            <a:gs pos="0">
+              <a:schemeClr val="phClr">
+                <a:satMod val="103000"/>
+                <a:lumMod val="102000"/>
+                <a:tint val="94000"/>
+              </a:schemeClr>
+            </a:gs>
+            <a:gs pos="50000">
+              <a:schemeClr val="phClr">
+                <a:satMod val="110000"/>
+                <a:lumMod val="100000"/>
+                <a:shade val="100000"/>
+              </a:schemeClr>
+            </a:gs>
+            <a:gs pos="100000">
+              <a:schemeClr val="phClr">
+                <a:lumMod val="99000"/>
+                <a:satMod val="120000"/>
+                <a:shade val="78000"/>
+              </a:schemeClr>
+            </a:gs>
+          </a:gsLst>
+          <a:lin ang="5400000" scaled="0"/>
+        </a:gradFill>
+      </a:fillStyleLst>
+      <a:lnStyleLst>
+        <a:ln w="6350" cap="flat" cmpd="sng" algn="ctr">
+          <a:solidFill>
+            <a:schemeClr val="phClr"/>
+          </a:solidFill>
+          <a:prstDash val="solid"/>
+          <a:miter lim="800000"/>
+        </a:ln>
+        <a:ln w="12700" cap="flat" cmpd="sng" algn="ctr">
+          <a:solidFill>
+            <a:schemeClr val="phClr"/>
+          </a:solidFill>
+          <a:prstDash val="solid"/>
+          <a:miter lim="800000"/>
+        </a:ln>
+        <a:ln w="19050" cap="flat" cmpd="sng" algn="ctr">
+          <a:solidFill>
+            <a:schemeClr val="phClr"/>
+          </a:solidFill>
+          <a:prstDash val="solid"/>
+          <a:miter lim="800000"/>
+        </a:ln>
+      </a:lnStyleLst>
+      <a:effectStyleLst>
+        <a:effectStyle>
+          <a:effectLst/>
+        </a:effectStyle>
+        <a:effectStyle>
+          <a:effectLst/>
+        </a:effectStyle>
+        <a:effectStyle>
+          <a:effectLst>
+            <a:outerShdw blurRad="57150" dist="19050" dir="5400000" algn="ctr" rotWithShape="0">
+              <a:srgbClr val="000000">
+                <a:alpha val="63000"/>
+              </a:srgbClr>
+            </a:outerShdw>
+          </a:effectLst>
+        </a:effectStyle>
+      </a:effectStyleLst>
+      <a:bgFillStyleLst>
+        <a:solidFill>
+          <a:schemeClr val="phClr"/>
+        </a:solidFill>
+        <a:solidFill>
+          <a:schemeClr val="phClr">
+            <a:tint val="95000"/>
+            <a:satMod val="170000"/>
+          </a:schemeClr>
+        </a:solidFill>
+        <a:gradFill rotWithShape="1">
+          <a:gsLst>
+            <a:gs pos="0">
+              <a:schemeClr val="phClr">
+                <a:tint val="93000"/>
+                <a:satMod val="150000"/>
+                <a:shade val="98000"/>
+                <a:lumMod val="102000"/>
+              </a:schemeClr>
+            </a:gs>
+            <a:gs pos="50000">
+              <a:schemeClr val="phClr">
+                <a:tint val="98000"/>
+                <a:satMod val="130000"/>
+                <a:shade val="90000"/>
+                <a:lumMod val="103000"/>
+              </a:schemeClr>
+            </a:gs>
+            <a:gs pos="100000">
+              <a:schemeClr val="phClr">
+                <a:shade val="63000"/>
+                <a:satMod val="120000"/>
+              </a:schemeClr>
+            </a:gs>
+          </a:gsLst>
+          <a:lin ang="5400000" scaled="0"/>
+        </a:gradFill>
+      </a:bgFillStyleLst>
+    </a:fmtScheme>
+  </a:themeElements>
+  <a:objectDefaults/>
+  <a:extraClrSchemeLst/>
+  <a:extLst>
+    <a:ext uri="{05A4C25C-085E-4340-85A3-A5531E510DB2}">
+      <thm15:themeFamily xmlns:thm15="http://schemas.microsoft.com/office/thememl/2012/main" name="Office Theme" id="{62F939B6-93AF-4DB8-9C6B-D6C7DFDC589F}" vid="{4A3C46E8-61CC-4603-A589-7422A47A8E4A}"/>
+    </a:ext>
+  </a:extLst>
+</a:theme>
 </file>